--- a/classes/parte-1-redes-y-seguridad-de-redes/045-netflow-y-analisis-de-metadatos-de-trafico/clase-045-presentacion.pptx
+++ b/classes/parte-1-redes-y-seguridad-de-redes/045-netflow-y-analisis-de-metadatos-de-trafico/clase-045-presentacion.pptx
@@ -17,6 +17,9 @@
     <p:sldId id="265" r:id="rId16"/>
     <p:sldId id="266" r:id="rId17"/>
     <p:sldId id="267" r:id="rId18"/>
+    <p:sldId id="268" r:id="rId19"/>
+    <p:sldId id="269" r:id="rId20"/>
+    <p:sldId id="270" r:id="rId21"/>
   </p:sldIdLst>
   <p:sldSz cx="9144000" cy="6858000" type="screen4x3"/>
   <p:notesSz cx="6858000" cy="9144000"/>
@@ -3198,7 +3201,7 @@
                   <a:srgbClr val="0B3D2E"/>
                 </a:solidFill>
               </a:rPr>
-              <a:t>⚠️ Errores comunes</a:t>
+              <a:t>✍️ Ejercicios</a:t>
             </a:r>
           </a:p>
         </p:txBody>
@@ -3236,67 +3239,82 @@
                   <a:srgbClr val="22282E"/>
                 </a:solidFill>
               </a:rPr>
-              <a:t>•  nfcapd no recibe flujos — Puerto/host del exportador no coincide; verifica que softflowd apunta al mismo ip:puerto</a:t>
-            </a:r>
-          </a:p>
-          <a:p>
-            <a:pPr>
-              <a:spcAft>
-                <a:spcPts val="600"/>
-              </a:spcAft>
-            </a:pPr>
-            <a:r>
-              <a:rPr sz="1500">
-                <a:solidFill>
-                  <a:srgbClr val="22282E"/>
-                </a:solidFill>
-              </a:rPr>
-              <a:t>•  Flujos incompletos o cortados — Timeouts de flujo mal ajustados; configura los active/inactive timeouts del exportador</a:t>
-            </a:r>
-          </a:p>
-          <a:p>
-            <a:pPr>
-              <a:spcAft>
-                <a:spcPts val="600"/>
-              </a:spcAft>
-            </a:pPr>
-            <a:r>
-              <a:rPr sz="1500">
-                <a:solidFill>
-                  <a:srgbClr val="22282E"/>
-                </a:solidFill>
-              </a:rPr>
-              <a:t>•  No distingues escaneo de tráfico normal — Falta filtrar por paquetes/bytes bajos y muchos destinos; refina la consulta</a:t>
-            </a:r>
-          </a:p>
-          <a:p>
-            <a:pPr>
-              <a:spcAft>
-                <a:spcPts val="600"/>
-              </a:spcAft>
-            </a:pPr>
-            <a:r>
-              <a:rPr sz="1500">
-                <a:solidFill>
-                  <a:srgbClr val="22282E"/>
-                </a:solidFill>
-              </a:rPr>
-              <a:t>•  Metadatos sin el detalle que necesitas — Los flujos no llevan payload; para el contenido recurre al full content (pcap)</a:t>
-            </a:r>
-          </a:p>
-          <a:p>
-            <a:pPr>
-              <a:spcAft>
-                <a:spcPts val="600"/>
-              </a:spcAft>
-            </a:pPr>
-            <a:r>
-              <a:rPr sz="1500">
-                <a:solidFill>
-                  <a:srgbClr val="22282E"/>
-                </a:solidFill>
-              </a:rPr>
-              <a:t>•  sFlow y NetFlow mezclados — Son formatos distintos (muestreo vs. flujo); usa el colector adecuado a cada uno</a:t>
+              <a:t>•  Identifica los cinco pares de hosts que más bytes intercambiaron en tu captura de flujos.</a:t>
+            </a:r>
+          </a:p>
+          <a:p>
+            <a:pPr>
+              <a:spcAft>
+                <a:spcPts val="600"/>
+              </a:spcAft>
+            </a:pPr>
+            <a:r>
+              <a:rPr sz="1500">
+                <a:solidFill>
+                  <a:srgbClr val="22282E"/>
+                </a:solidFill>
+              </a:rPr>
+              <a:t>•  Detecta un escaneo horizontal (una IP contra muchas) en los flujos y descríbelo.</a:t>
+            </a:r>
+          </a:p>
+          <a:p>
+            <a:pPr>
+              <a:spcAft>
+                <a:spcPts val="600"/>
+              </a:spcAft>
+            </a:pPr>
+            <a:r>
+              <a:rPr sz="1500">
+                <a:solidFill>
+                  <a:srgbClr val="22282E"/>
+                </a:solidFill>
+              </a:rPr>
+              <a:t>•  Explica cómo se vería un ataque DDoS volumétrico en los metadatos de flujo.</a:t>
+            </a:r>
+          </a:p>
+          <a:p>
+            <a:pPr>
+              <a:spcAft>
+                <a:spcPts val="600"/>
+              </a:spcAft>
+            </a:pPr>
+            <a:r>
+              <a:rPr sz="1500">
+                <a:solidFill>
+                  <a:srgbClr val="22282E"/>
+                </a:solidFill>
+              </a:rPr>
+              <a:t>•  Busca un patrón de beaconing y argumenta por qué la regularidad temporal es sospechosa.</a:t>
+            </a:r>
+          </a:p>
+          <a:p>
+            <a:pPr>
+              <a:spcAft>
+                <a:spcPts val="600"/>
+              </a:spcAft>
+            </a:pPr>
+            <a:r>
+              <a:rPr sz="1500">
+                <a:solidFill>
+                  <a:srgbClr val="22282E"/>
+                </a:solidFill>
+              </a:rPr>
+              <a:t>•  Compara el tamaño en disco de los flujos frente al pcap equivalente y comenta el ahorro.</a:t>
+            </a:r>
+          </a:p>
+          <a:p>
+            <a:pPr>
+              <a:spcAft>
+                <a:spcPts val="600"/>
+              </a:spcAft>
+            </a:pPr>
+            <a:r>
+              <a:rPr sz="1500">
+                <a:solidFill>
+                  <a:srgbClr val="22282E"/>
+                </a:solidFill>
+              </a:rPr>
+              <a:t>•  Diseña qué campos de flujo alimentarías a un SIEM para alertas de anomalía de red.</a:t>
             </a:r>
           </a:p>
         </p:txBody>
@@ -3347,7 +3365,7 @@
                   <a:srgbClr val="0B3D2E"/>
                 </a:solidFill>
               </a:rPr>
-              <a:t>❓ Preguntas frecuentes</a:t>
+              <a:t>📝 Reto verificable</a:t>
             </a:r>
           </a:p>
         </p:txBody>
@@ -3385,97 +3403,22 @@
                   <a:srgbClr val="22282E"/>
                 </a:solidFill>
               </a:rPr>
-              <a:t>•  ❓ ¿Por qué usar flujos si tengo capturas completas?</a:t>
-            </a:r>
-          </a:p>
-          <a:p>
-            <a:pPr>
-              <a:spcAft>
-                <a:spcPts val="600"/>
-              </a:spcAft>
-            </a:pPr>
-            <a:r>
-              <a:rPr sz="1500">
-                <a:solidFill>
-                  <a:srgbClr val="22282E"/>
-                </a:solidFill>
-              </a:rPr>
-              <a:t>•  Por escala. En redes grandes es inviable guardar todo el tráfico; los flujos ocupan una fracción y permiten monitoreo histórico amplio para detectar y triar, dejando el full content para lo puntual.</a:t>
-            </a:r>
-          </a:p>
-          <a:p>
-            <a:pPr>
-              <a:spcAft>
-                <a:spcPts val="600"/>
-              </a:spcAft>
-            </a:pPr>
-            <a:r>
-              <a:rPr sz="1500">
-                <a:solidFill>
-                  <a:srgbClr val="22282E"/>
-                </a:solidFill>
-              </a:rPr>
-              <a:t>•  ❓ ¿Los metadatos revelan el contenido?</a:t>
-            </a:r>
-          </a:p>
-          <a:p>
-            <a:pPr>
-              <a:spcAft>
-                <a:spcPts val="600"/>
-              </a:spcAft>
-            </a:pPr>
-            <a:r>
-              <a:rPr sz="1500">
-                <a:solidFill>
-                  <a:srgbClr val="22282E"/>
-                </a:solidFill>
-              </a:rPr>
-              <a:t>•  No el contenido, pero sí el patrón de comunicación (quién, cuándo, cuánto, con qué). Eso ya es muy revelador y a menudo suficiente para detectar comportamiento malicioso.</a:t>
-            </a:r>
-          </a:p>
-          <a:p>
-            <a:pPr>
-              <a:spcAft>
-                <a:spcPts val="600"/>
-              </a:spcAft>
-            </a:pPr>
-            <a:r>
-              <a:rPr sz="1500">
-                <a:solidFill>
-                  <a:srgbClr val="22282E"/>
-                </a:solidFill>
-              </a:rPr>
-              <a:t>•  ❓ ¿NetFlow, IPFIX o sFlow?</a:t>
-            </a:r>
-          </a:p>
-          <a:p>
-            <a:pPr>
-              <a:spcAft>
-                <a:spcPts val="600"/>
-              </a:spcAft>
-            </a:pPr>
-            <a:r>
-              <a:rPr sz="1500">
-                <a:solidFill>
-                  <a:srgbClr val="22282E"/>
-                </a:solidFill>
-              </a:rPr>
-              <a:t>•  NetFlow/IPFIX registran flujos completos (IPFIX es el estándar abierto); sFlow muestrea paquetes. Elige según lo que exporten tus dispositivos y el nivel de detalle que necesites.</a:t>
-            </a:r>
-          </a:p>
-          <a:p>
-            <a:pPr>
-              <a:spcAft>
-                <a:spcPts val="600"/>
-              </a:spcAft>
-            </a:pPr>
-            <a:r>
-              <a:rPr sz="1500">
-                <a:solidFill>
-                  <a:srgbClr val="22282E"/>
-                </a:solidFill>
-              </a:rPr>
-              <a:t>•  ❓ ¿Cómo detecto C2 con flujos?</a:t>
+              <a:t>•  Genera flujos NetFlow de tu laboratorio que incluyan tráfico normal más una actividad anómala que tú introduzcas (un escaneo con Nmap o una transferencia grande hacia un destino externo simulado).…</a:t>
+            </a:r>
+          </a:p>
+          <a:p>
+            <a:pPr>
+              <a:spcAft>
+                <a:spcPts val="600"/>
+              </a:spcAft>
+            </a:pPr>
+            <a:r>
+              <a:rPr sz="1500">
+                <a:solidFill>
+                  <a:srgbClr val="22282E"/>
+                </a:solidFill>
+              </a:rPr>
+              <a:t>•  Criterio de aceptación: identificas correctamente la actividad anómala a partir de los flujos (no del contenido), la caracterizas (escaneo/exfiltración/beaconing) y aportas la consulta nfdump que la…</a:t>
             </a:r>
           </a:p>
         </p:txBody>
@@ -3526,7 +3469,7 @@
                   <a:srgbClr val="0B3D2E"/>
                 </a:solidFill>
               </a:rPr>
-              <a:t>🔗 Referencias</a:t>
+              <a:t>⚠️ Errores comunes</a:t>
             </a:r>
           </a:p>
         </p:txBody>
@@ -3564,6 +3507,334 @@
                   <a:srgbClr val="22282E"/>
                 </a:solidFill>
               </a:rPr>
+              <a:t>•  nfcapd no recibe flujos — Puerto/host del exportador no coincide; verifica que softflowd apunta al mismo ip:puerto</a:t>
+            </a:r>
+          </a:p>
+          <a:p>
+            <a:pPr>
+              <a:spcAft>
+                <a:spcPts val="600"/>
+              </a:spcAft>
+            </a:pPr>
+            <a:r>
+              <a:rPr sz="1500">
+                <a:solidFill>
+                  <a:srgbClr val="22282E"/>
+                </a:solidFill>
+              </a:rPr>
+              <a:t>•  Flujos incompletos o cortados — Timeouts de flujo mal ajustados; configura los active/inactive timeouts del exportador</a:t>
+            </a:r>
+          </a:p>
+          <a:p>
+            <a:pPr>
+              <a:spcAft>
+                <a:spcPts val="600"/>
+              </a:spcAft>
+            </a:pPr>
+            <a:r>
+              <a:rPr sz="1500">
+                <a:solidFill>
+                  <a:srgbClr val="22282E"/>
+                </a:solidFill>
+              </a:rPr>
+              <a:t>•  No distingues escaneo de tráfico normal — Falta filtrar por paquetes/bytes bajos y muchos destinos; refina la consulta</a:t>
+            </a:r>
+          </a:p>
+          <a:p>
+            <a:pPr>
+              <a:spcAft>
+                <a:spcPts val="600"/>
+              </a:spcAft>
+            </a:pPr>
+            <a:r>
+              <a:rPr sz="1500">
+                <a:solidFill>
+                  <a:srgbClr val="22282E"/>
+                </a:solidFill>
+              </a:rPr>
+              <a:t>•  Metadatos sin el detalle que necesitas — Los flujos no llevan payload; para el contenido recurre al full content (pcap)</a:t>
+            </a:r>
+          </a:p>
+          <a:p>
+            <a:pPr>
+              <a:spcAft>
+                <a:spcPts val="600"/>
+              </a:spcAft>
+            </a:pPr>
+            <a:r>
+              <a:rPr sz="1500">
+                <a:solidFill>
+                  <a:srgbClr val="22282E"/>
+                </a:solidFill>
+              </a:rPr>
+              <a:t>•  sFlow y NetFlow mezclados — Son formatos distintos (muestreo vs. flujo); usa el colector adecuado a cada uno</a:t>
+            </a:r>
+          </a:p>
+        </p:txBody>
+      </p:sp>
+    </p:spTree>
+  </p:cSld>
+  <p:clrMapOvr>
+    <a:masterClrMapping/>
+  </p:clrMapOvr>
+</p:sld>
+</file>
+
+<file path=ppt/slides/slide13.xml><?xml version="1.0" encoding="utf-8"?>
+<p:sld xmlns:a="http://schemas.openxmlformats.org/drawingml/2006/main" xmlns:p="http://schemas.openxmlformats.org/presentationml/2006/main" xmlns:r="http://schemas.openxmlformats.org/officeDocument/2006/relationships">
+  <p:cSld>
+    <p:spTree>
+      <p:nvGrpSpPr>
+        <p:cNvPr id="1" name=""/>
+        <p:cNvGrpSpPr/>
+        <p:nvPr/>
+      </p:nvGrpSpPr>
+      <p:grpSpPr/>
+      <p:sp>
+        <p:nvSpPr>
+          <p:cNvPr id="2" name="TextBox 1"/>
+          <p:cNvSpPr txBox="1"/>
+          <p:nvPr/>
+        </p:nvSpPr>
+        <p:spPr>
+          <a:xfrm>
+            <a:off x="457200" y="320040"/>
+            <a:ext cx="8229600" cy="822960"/>
+          </a:xfrm>
+          <a:prstGeom prst="rect">
+            <a:avLst/>
+          </a:prstGeom>
+          <a:noFill/>
+        </p:spPr>
+        <p:txBody>
+          <a:bodyPr wrap="square">
+            <a:spAutoFit/>
+          </a:bodyPr>
+          <a:lstStyle/>
+          <a:p>
+            <a:r>
+              <a:rPr sz="2600" b="1">
+                <a:solidFill>
+                  <a:srgbClr val="0B3D2E"/>
+                </a:solidFill>
+              </a:rPr>
+              <a:t>❓ Preguntas frecuentes</a:t>
+            </a:r>
+          </a:p>
+        </p:txBody>
+      </p:sp>
+      <p:sp>
+        <p:nvSpPr>
+          <p:cNvPr id="3" name="TextBox 2"/>
+          <p:cNvSpPr txBox="1"/>
+          <p:nvPr/>
+        </p:nvSpPr>
+        <p:spPr>
+          <a:xfrm>
+            <a:off x="457200" y="1280160"/>
+            <a:ext cx="8229600" cy="4937760"/>
+          </a:xfrm>
+          <a:prstGeom prst="rect">
+            <a:avLst/>
+          </a:prstGeom>
+          <a:noFill/>
+        </p:spPr>
+        <p:txBody>
+          <a:bodyPr wrap="square">
+            <a:spAutoFit/>
+          </a:bodyPr>
+          <a:lstStyle/>
+          <a:p>
+            <a:pPr>
+              <a:spcAft>
+                <a:spcPts val="600"/>
+              </a:spcAft>
+            </a:pPr>
+            <a:r>
+              <a:rPr sz="1500">
+                <a:solidFill>
+                  <a:srgbClr val="22282E"/>
+                </a:solidFill>
+              </a:rPr>
+              <a:t>•  ❓ ¿Por qué usar flujos si tengo capturas completas?</a:t>
+            </a:r>
+          </a:p>
+          <a:p>
+            <a:pPr>
+              <a:spcAft>
+                <a:spcPts val="600"/>
+              </a:spcAft>
+            </a:pPr>
+            <a:r>
+              <a:rPr sz="1500">
+                <a:solidFill>
+                  <a:srgbClr val="22282E"/>
+                </a:solidFill>
+              </a:rPr>
+              <a:t>•  Por escala. En redes grandes es inviable guardar todo el tráfico; los flujos ocupan una fracción y permiten monitoreo histórico amplio para detectar y triar, dejando el full content para lo puntual.</a:t>
+            </a:r>
+          </a:p>
+          <a:p>
+            <a:pPr>
+              <a:spcAft>
+                <a:spcPts val="600"/>
+              </a:spcAft>
+            </a:pPr>
+            <a:r>
+              <a:rPr sz="1500">
+                <a:solidFill>
+                  <a:srgbClr val="22282E"/>
+                </a:solidFill>
+              </a:rPr>
+              <a:t>•  ❓ ¿Los metadatos revelan el contenido?</a:t>
+            </a:r>
+          </a:p>
+          <a:p>
+            <a:pPr>
+              <a:spcAft>
+                <a:spcPts val="600"/>
+              </a:spcAft>
+            </a:pPr>
+            <a:r>
+              <a:rPr sz="1500">
+                <a:solidFill>
+                  <a:srgbClr val="22282E"/>
+                </a:solidFill>
+              </a:rPr>
+              <a:t>•  No el contenido, pero sí el patrón de comunicación (quién, cuándo, cuánto, con qué). Eso ya es muy revelador y a menudo suficiente para detectar comportamiento malicioso.</a:t>
+            </a:r>
+          </a:p>
+          <a:p>
+            <a:pPr>
+              <a:spcAft>
+                <a:spcPts val="600"/>
+              </a:spcAft>
+            </a:pPr>
+            <a:r>
+              <a:rPr sz="1500">
+                <a:solidFill>
+                  <a:srgbClr val="22282E"/>
+                </a:solidFill>
+              </a:rPr>
+              <a:t>•  ❓ ¿NetFlow, IPFIX o sFlow?</a:t>
+            </a:r>
+          </a:p>
+          <a:p>
+            <a:pPr>
+              <a:spcAft>
+                <a:spcPts val="600"/>
+              </a:spcAft>
+            </a:pPr>
+            <a:r>
+              <a:rPr sz="1500">
+                <a:solidFill>
+                  <a:srgbClr val="22282E"/>
+                </a:solidFill>
+              </a:rPr>
+              <a:t>•  NetFlow/IPFIX registran flujos completos (IPFIX es el estándar abierto); sFlow muestrea paquetes. Elige según lo que exporten tus dispositivos y el nivel de detalle que necesites.</a:t>
+            </a:r>
+          </a:p>
+          <a:p>
+            <a:pPr>
+              <a:spcAft>
+                <a:spcPts val="600"/>
+              </a:spcAft>
+            </a:pPr>
+            <a:r>
+              <a:rPr sz="1500">
+                <a:solidFill>
+                  <a:srgbClr val="22282E"/>
+                </a:solidFill>
+              </a:rPr>
+              <a:t>•  ❓ ¿Cómo detecto C2 con flujos?</a:t>
+            </a:r>
+          </a:p>
+        </p:txBody>
+      </p:sp>
+    </p:spTree>
+  </p:cSld>
+  <p:clrMapOvr>
+    <a:masterClrMapping/>
+  </p:clrMapOvr>
+</p:sld>
+</file>
+
+<file path=ppt/slides/slide14.xml><?xml version="1.0" encoding="utf-8"?>
+<p:sld xmlns:a="http://schemas.openxmlformats.org/drawingml/2006/main" xmlns:p="http://schemas.openxmlformats.org/presentationml/2006/main" xmlns:r="http://schemas.openxmlformats.org/officeDocument/2006/relationships">
+  <p:cSld>
+    <p:spTree>
+      <p:nvGrpSpPr>
+        <p:cNvPr id="1" name=""/>
+        <p:cNvGrpSpPr/>
+        <p:nvPr/>
+      </p:nvGrpSpPr>
+      <p:grpSpPr/>
+      <p:sp>
+        <p:nvSpPr>
+          <p:cNvPr id="2" name="TextBox 1"/>
+          <p:cNvSpPr txBox="1"/>
+          <p:nvPr/>
+        </p:nvSpPr>
+        <p:spPr>
+          <a:xfrm>
+            <a:off x="457200" y="320040"/>
+            <a:ext cx="8229600" cy="822960"/>
+          </a:xfrm>
+          <a:prstGeom prst="rect">
+            <a:avLst/>
+          </a:prstGeom>
+          <a:noFill/>
+        </p:spPr>
+        <p:txBody>
+          <a:bodyPr wrap="square">
+            <a:spAutoFit/>
+          </a:bodyPr>
+          <a:lstStyle/>
+          <a:p>
+            <a:r>
+              <a:rPr sz="2600" b="1">
+                <a:solidFill>
+                  <a:srgbClr val="0B3D2E"/>
+                </a:solidFill>
+              </a:rPr>
+              <a:t>🔗 Referencias</a:t>
+            </a:r>
+          </a:p>
+        </p:txBody>
+      </p:sp>
+      <p:sp>
+        <p:nvSpPr>
+          <p:cNvPr id="3" name="TextBox 2"/>
+          <p:cNvSpPr txBox="1"/>
+          <p:nvPr/>
+        </p:nvSpPr>
+        <p:spPr>
+          <a:xfrm>
+            <a:off x="457200" y="1280160"/>
+            <a:ext cx="8229600" cy="4937760"/>
+          </a:xfrm>
+          <a:prstGeom prst="rect">
+            <a:avLst/>
+          </a:prstGeom>
+          <a:noFill/>
+        </p:spPr>
+        <p:txBody>
+          <a:bodyPr wrap="square">
+            <a:spAutoFit/>
+          </a:bodyPr>
+          <a:lstStyle/>
+          <a:p>
+            <a:pPr>
+              <a:spcAft>
+                <a:spcPts val="600"/>
+              </a:spcAft>
+            </a:pPr>
+            <a:r>
+              <a:rPr sz="1500">
+                <a:solidFill>
+                  <a:srgbClr val="22282E"/>
+                </a:solidFill>
+              </a:rPr>
               <a:t>•  RFC 7011 — IPFIX Protocol Specification. &lt;https://www.rfc-editor.org/rfc/rfc7011&gt;</a:t>
             </a:r>
           </a:p>
@@ -3614,6 +3885,81 @@
           </a:p>
         </p:txBody>
       </p:sp>
+    </p:spTree>
+  </p:cSld>
+  <p:clrMapOvr>
+    <a:masterClrMapping/>
+  </p:clrMapOvr>
+</p:sld>
+</file>
+
+<file path=ppt/slides/slide15.xml><?xml version="1.0" encoding="utf-8"?>
+<p:sld xmlns:a="http://schemas.openxmlformats.org/drawingml/2006/main" xmlns:p="http://schemas.openxmlformats.org/presentationml/2006/main" xmlns:r="http://schemas.openxmlformats.org/officeDocument/2006/relationships">
+  <p:cSld>
+    <p:spTree>
+      <p:nvGrpSpPr>
+        <p:cNvPr id="1" name=""/>
+        <p:cNvGrpSpPr/>
+        <p:nvPr/>
+      </p:nvGrpSpPr>
+      <p:grpSpPr/>
+      <p:sp>
+        <p:nvSpPr>
+          <p:cNvPr id="2" name="TextBox 1"/>
+          <p:cNvSpPr txBox="1"/>
+          <p:nvPr/>
+        </p:nvSpPr>
+        <p:spPr>
+          <a:xfrm>
+            <a:off x="457200" y="274320"/>
+            <a:ext cx="8229600" cy="640080"/>
+          </a:xfrm>
+          <a:prstGeom prst="rect">
+            <a:avLst/>
+          </a:prstGeom>
+          <a:noFill/>
+        </p:spPr>
+        <p:txBody>
+          <a:bodyPr wrap="square">
+            <a:spAutoFit/>
+          </a:bodyPr>
+          <a:lstStyle/>
+          <a:p>
+            <a:r>
+              <a:rPr sz="2200" b="1">
+                <a:solidFill>
+                  <a:srgbClr val="0B3D2E"/>
+                </a:solidFill>
+              </a:rPr>
+              <a:t>Diagrama de la clase</a:t>
+            </a:r>
+          </a:p>
+        </p:txBody>
+      </p:sp>
+      <p:pic>
+        <p:nvPicPr>
+          <p:cNvPr id="3" name="Picture 2" descr="62990894071d742f.png"/>
+          <p:cNvPicPr>
+            <a:picLocks noChangeAspect="1"/>
+          </p:cNvPicPr>
+          <p:nvPr/>
+        </p:nvPicPr>
+        <p:blipFill>
+          <a:blip r:embed="rId2"/>
+          <a:stretch>
+            <a:fillRect/>
+          </a:stretch>
+        </p:blipFill>
+        <p:spPr>
+          <a:xfrm>
+            <a:off x="457200" y="1805940"/>
+            <a:ext cx="8229600" cy="3886200"/>
+          </a:xfrm>
+          <a:prstGeom prst="rect">
+            <a:avLst/>
+          </a:prstGeom>
+        </p:spPr>
+      </p:pic>
     </p:spTree>
   </p:cSld>
   <p:clrMapOvr>
@@ -3698,7 +4044,7 @@
                   <a:srgbClr val="22282E"/>
                 </a:solidFill>
               </a:rPr>
-              <a:t>•  Cerrar la parte con el análisis de metadatos de flujo (NetFlow/IPFIX/sFlow): resúmenes de conexiones que permiten monitorizar redes enormes con un coste mínimo de almacenamiento, detectar anomalías (escaneos, DDoS, exfiltración, beaconing) y responder preguntas de visibilidad a escala que la captura completa no puede afrontar.</a:t>
+              <a:t>•  Cerrar la parte con el análisis de metadatos de flujo (NetFlow/IPFIX/sFlow): resúmenes de conexiones que permiten monitorizar redes enormes con un coste mínimo de almacenamiento, detectar anomalías…</a:t>
             </a:r>
           </a:p>
         </p:txBody>
@@ -4107,7 +4453,7 @@
                   <a:srgbClr val="0B3D2E"/>
                 </a:solidFill>
               </a:rPr>
-              <a:t>📖 Definiciones y características</a:t>
+              <a:t>🧠 Explicación en profundidad</a:t>
             </a:r>
           </a:p>
         </p:txBody>
@@ -4145,67 +4491,97 @@
                   <a:srgbClr val="22282E"/>
                 </a:solidFill>
               </a:rPr>
-              <a:t>•  Flujo (flow): secuencia unidireccional de paquetes que comparten la 5-tupla (IP origen/destino, puertos, protocolo) en un intervalo; se resume en un registro con bytes, paquetes, marcas de tiempo y flags.</a:t>
-            </a:r>
-          </a:p>
-          <a:p>
-            <a:pPr>
-              <a:spcAft>
-                <a:spcPts val="600"/>
-              </a:spcAft>
-            </a:pPr>
-            <a:r>
-              <a:rPr sz="1500">
-                <a:solidFill>
-                  <a:srgbClr val="22282E"/>
-                </a:solidFill>
-              </a:rPr>
-              <a:t>•  NetFlow: tecnología de Cisco para exportar registros de flujo; v9 es basada en plantillas y IPFIX es su estandarización IETF.</a:t>
-            </a:r>
-          </a:p>
-          <a:p>
-            <a:pPr>
-              <a:spcAft>
-                <a:spcPts val="600"/>
-              </a:spcAft>
-            </a:pPr>
-            <a:r>
-              <a:rPr sz="1500">
-                <a:solidFill>
-                  <a:srgbClr val="22282E"/>
-                </a:solidFill>
-              </a:rPr>
-              <a:t>•  sFlow: muestreo de paquetes (no flujos completos) exportado por switches; útil para estadísticas a gran escala con bajo coste.</a:t>
-            </a:r>
-          </a:p>
-          <a:p>
-            <a:pPr>
-              <a:spcAft>
-                <a:spcPts val="600"/>
-              </a:spcAft>
-            </a:pPr>
-            <a:r>
-              <a:rPr sz="1500">
-                <a:solidFill>
-                  <a:srgbClr val="22282E"/>
-                </a:solidFill>
-              </a:rPr>
-              <a:t>•  Exportador/colector: el router/switch exporta los flujos; un colector (nfcapd, SiLK) los recibe y almacena para consulta.</a:t>
-            </a:r>
-          </a:p>
-          <a:p>
-            <a:pPr>
-              <a:spcAft>
-                <a:spcPts val="600"/>
-              </a:spcAft>
-            </a:pPr>
-            <a:r>
-              <a:rPr sz="1500">
-                <a:solidFill>
-                  <a:srgbClr val="22282E"/>
-                </a:solidFill>
-              </a:rPr>
-              <a:t>•  Beaconing: patrón de conexiones regulares y periódicas hacia un mismo destino, típico de malware que "llama a casa" (C2).</a:t>
+              <a:t>•  El contenido completo es carísimo y el cifrado esconde la carga útil de casi todo el</a:t>
+            </a:r>
+          </a:p>
+          <a:p>
+            <a:pPr>
+              <a:spcAft>
+                <a:spcPts val="600"/>
+              </a:spcAft>
+            </a:pPr>
+            <a:r>
+              <a:rPr sz="1500">
+                <a:solidFill>
+                  <a:srgbClr val="22282E"/>
+                </a:solidFill>
+              </a:rPr>
+              <a:t>•  tráfico. De esa doble realidad nace el análisis de flujos: renunciar a qué se dijo</a:t>
+            </a:r>
+          </a:p>
+          <a:p>
+            <a:pPr>
+              <a:spcAft>
+                <a:spcPts val="600"/>
+              </a:spcAft>
+            </a:pPr>
+            <a:r>
+              <a:rPr sz="1500">
+                <a:solidFill>
+                  <a:srgbClr val="22282E"/>
+                </a:solidFill>
+              </a:rPr>
+              <a:t>•  para quedarse con los metadatos de quién habló con quién, cuándo, por cuánto tiempo y</a:t>
+            </a:r>
+          </a:p>
+          <a:p>
+            <a:pPr>
+              <a:spcAft>
+                <a:spcPts val="600"/>
+              </a:spcAft>
+            </a:pPr>
+            <a:r>
+              <a:rPr sz="1500">
+                <a:solidFill>
+                  <a:srgbClr val="22282E"/>
+                </a:solidFill>
+              </a:rPr>
+              <a:t>•  cuánto volumen. Un flujo es una secuencia unidireccional de paquetes que comparten</a:t>
+            </a:r>
+          </a:p>
+          <a:p>
+            <a:pPr>
+              <a:spcAft>
+                <a:spcPts val="600"/>
+              </a:spcAft>
+            </a:pPr>
+            <a:r>
+              <a:rPr sz="1500">
+                <a:solidFill>
+                  <a:srgbClr val="22282E"/>
+                </a:solidFill>
+              </a:rPr>
+              <a:t>•  una 5-tupla —IP origen, IP destino, puerto origen, puerto destino y protocolo—; el</a:t>
+            </a:r>
+          </a:p>
+          <a:p>
+            <a:pPr>
+              <a:spcAft>
+                <a:spcPts val="600"/>
+              </a:spcAft>
+            </a:pPr>
+            <a:r>
+              <a:rPr sz="1500">
+                <a:solidFill>
+                  <a:srgbClr val="22282E"/>
+                </a:solidFill>
+              </a:rPr>
+              <a:t>•  registro de flujo resume esa conversación en unas pocas decenas de bytes. Esa compresión</a:t>
+            </a:r>
+          </a:p>
+          <a:p>
+            <a:pPr>
+              <a:spcAft>
+                <a:spcPts val="600"/>
+              </a:spcAft>
+            </a:pPr>
+            <a:r>
+              <a:rPr sz="1500">
+                <a:solidFill>
+                  <a:srgbClr val="22282E"/>
+                </a:solidFill>
+              </a:rPr>
+              <a:t>•  brutal es lo que permite retener meses de actividad de una red entera, y por eso los</a:t>
             </a:r>
           </a:p>
         </p:txBody>
@@ -4256,7 +4632,7 @@
                   <a:srgbClr val="0B3D2E"/>
                 </a:solidFill>
               </a:rPr>
-              <a:t>🧰 Herramientas y preparación</a:t>
+              <a:t>📖 Definiciones y características</a:t>
             </a:r>
           </a:p>
         </p:txBody>
@@ -4294,52 +4670,67 @@
                   <a:srgbClr val="22282E"/>
                 </a:solidFill>
               </a:rPr>
-              <a:t>•  nfdump/nfcapd (colector y consulta de NetFlow): sudo apt install nfdump.</a:t>
-            </a:r>
-          </a:p>
-          <a:p>
-            <a:pPr>
-              <a:spcAft>
-                <a:spcPts val="600"/>
-              </a:spcAft>
-            </a:pPr>
-            <a:r>
-              <a:rPr sz="1500">
-                <a:solidFill>
-                  <a:srgbClr val="22282E"/>
-                </a:solidFill>
-              </a:rPr>
-              <a:t>•  SiLK (System for Internet-Level Knowledge) para análisis avanzado.</a:t>
-            </a:r>
-          </a:p>
-          <a:p>
-            <a:pPr>
-              <a:spcAft>
-                <a:spcPts val="600"/>
-              </a:spcAft>
-            </a:pPr>
-            <a:r>
-              <a:rPr sz="1500">
-                <a:solidFill>
-                  <a:srgbClr val="22282E"/>
-                </a:solidFill>
-              </a:rPr>
-              <a:t>•  softflowd o fprobe para generar NetFlow a partir de tráfico si no tienes un router que lo exporte.</a:t>
-            </a:r>
-          </a:p>
-          <a:p>
-            <a:pPr>
-              <a:spcAft>
-                <a:spcPts val="600"/>
-              </a:spcAft>
-            </a:pPr>
-            <a:r>
-              <a:rPr sz="1500">
-                <a:solidFill>
-                  <a:srgbClr val="22282E"/>
-                </a:solidFill>
-              </a:rPr>
-              <a:t>•  Un pcap o tráfico en vivo de laboratorio.</a:t>
+              <a:t>•  Flujo (flow): secuencia unidireccional de paquetes que comparten la 5-tupla (IP origen/destino, puertos, protocolo) en un intervalo; se resume en un registro con bytes, paquetes, marcas de tiempo y…</a:t>
+            </a:r>
+          </a:p>
+          <a:p>
+            <a:pPr>
+              <a:spcAft>
+                <a:spcPts val="600"/>
+              </a:spcAft>
+            </a:pPr>
+            <a:r>
+              <a:rPr sz="1500">
+                <a:solidFill>
+                  <a:srgbClr val="22282E"/>
+                </a:solidFill>
+              </a:rPr>
+              <a:t>•  NetFlow: tecnología de Cisco para exportar registros de flujo; v9 es basada en plantillas y IPFIX es su estandarización IETF.</a:t>
+            </a:r>
+          </a:p>
+          <a:p>
+            <a:pPr>
+              <a:spcAft>
+                <a:spcPts val="600"/>
+              </a:spcAft>
+            </a:pPr>
+            <a:r>
+              <a:rPr sz="1500">
+                <a:solidFill>
+                  <a:srgbClr val="22282E"/>
+                </a:solidFill>
+              </a:rPr>
+              <a:t>•  sFlow: muestreo de paquetes (no flujos completos) exportado por switches; útil para estadísticas a gran escala con bajo coste.</a:t>
+            </a:r>
+          </a:p>
+          <a:p>
+            <a:pPr>
+              <a:spcAft>
+                <a:spcPts val="600"/>
+              </a:spcAft>
+            </a:pPr>
+            <a:r>
+              <a:rPr sz="1500">
+                <a:solidFill>
+                  <a:srgbClr val="22282E"/>
+                </a:solidFill>
+              </a:rPr>
+              <a:t>•  Exportador/colector: el router/switch exporta los flujos; un colector (nfcapd, SiLK) los recibe y almacena para consulta.</a:t>
+            </a:r>
+          </a:p>
+          <a:p>
+            <a:pPr>
+              <a:spcAft>
+                <a:spcPts val="600"/>
+              </a:spcAft>
+            </a:pPr>
+            <a:r>
+              <a:rPr sz="1500">
+                <a:solidFill>
+                  <a:srgbClr val="22282E"/>
+                </a:solidFill>
+              </a:rPr>
+              <a:t>•  Beaconing: patrón de conexiones regulares y periódicas hacia un mismo destino, típico de malware que "llama a casa" (C2).</a:t>
             </a:r>
           </a:p>
         </p:txBody>
@@ -4390,7 +4781,7 @@
                   <a:srgbClr val="0B3D2E"/>
                 </a:solidFill>
               </a:rPr>
-              <a:t>🧪 Laboratorio guiado</a:t>
+              <a:t>📔 Glosario</a:t>
             </a:r>
           </a:p>
         </p:txBody>
@@ -4428,97 +4819,97 @@
                   <a:srgbClr val="22282E"/>
                 </a:solidFill>
               </a:rPr>
-              <a:t>•  Genera NetFlow desde tráfico en vivo con softflowd apuntando a un colector local:</a:t>
-            </a:r>
-          </a:p>
-          <a:p>
-            <a:pPr>
-              <a:spcAft>
-                <a:spcPts val="600"/>
-              </a:spcAft>
-            </a:pPr>
-            <a:r>
-              <a:rPr sz="1500">
-                <a:solidFill>
-                  <a:srgbClr val="22282E"/>
-                </a:solidFill>
-              </a:rPr>
-              <a:t>•  sudo softflowd -i eth0 -n 127.0.0.1:9995</a:t>
-            </a:r>
-          </a:p>
-          <a:p>
-            <a:pPr>
-              <a:spcAft>
-                <a:spcPts val="600"/>
-              </a:spcAft>
-            </a:pPr>
-            <a:r>
-              <a:rPr sz="1500">
-                <a:solidFill>
-                  <a:srgbClr val="22282E"/>
-                </a:solidFill>
-              </a:rPr>
-              <a:t>•  Recolecta con nfcapd:</a:t>
-            </a:r>
-          </a:p>
-          <a:p>
-            <a:pPr>
-              <a:spcAft>
-                <a:spcPts val="600"/>
-              </a:spcAft>
-            </a:pPr>
-            <a:r>
-              <a:rPr sz="1500">
-                <a:solidFill>
-                  <a:srgbClr val="22282E"/>
-                </a:solidFill>
-              </a:rPr>
-              <a:t>•  nfcapd -w -D -l /tmp/flows -p 9995</a:t>
-            </a:r>
-          </a:p>
-          <a:p>
-            <a:pPr>
-              <a:spcAft>
-                <a:spcPts val="600"/>
-              </a:spcAft>
-            </a:pPr>
-            <a:r>
-              <a:rPr sz="1500">
-                <a:solidFill>
-                  <a:srgbClr val="22282E"/>
-                </a:solidFill>
-              </a:rPr>
-              <a:t>•  Consulta los flujos con nfdump:</a:t>
-            </a:r>
-          </a:p>
-          <a:p>
-            <a:pPr>
-              <a:spcAft>
-                <a:spcPts val="600"/>
-              </a:spcAft>
-            </a:pPr>
-            <a:r>
-              <a:rPr sz="1500">
-                <a:solidFill>
-                  <a:srgbClr val="22282E"/>
-                </a:solidFill>
-              </a:rPr>
-              <a:t>•  nfdump -R /tmp/flows -o extended</a:t>
-            </a:r>
-          </a:p>
-          <a:p>
-            <a:pPr>
-              <a:spcAft>
-                <a:spcPts val="600"/>
-              </a:spcAft>
-            </a:pPr>
-            <a:r>
-              <a:rPr sz="1500">
-                <a:solidFill>
-                  <a:srgbClr val="22282E"/>
-                </a:solidFill>
-              </a:rPr>
-              <a:t>•  Top talkers (quién genera más tráfico):</a:t>
+              <a:t>•  Término — Definición concisa</a:t>
+            </a:r>
+          </a:p>
+          <a:p>
+            <a:pPr>
+              <a:spcAft>
+                <a:spcPts val="600"/>
+              </a:spcAft>
+            </a:pPr>
+            <a:r>
+              <a:rPr sz="1500">
+                <a:solidFill>
+                  <a:srgbClr val="22282E"/>
+                </a:solidFill>
+              </a:rPr>
+              <a:t>•  Flujo — Secuencia unidireccional de paquetes con una 5-tupla común</a:t>
+            </a:r>
+          </a:p>
+          <a:p>
+            <a:pPr>
+              <a:spcAft>
+                <a:spcPts val="600"/>
+              </a:spcAft>
+            </a:pPr>
+            <a:r>
+              <a:rPr sz="1500">
+                <a:solidFill>
+                  <a:srgbClr val="22282E"/>
+                </a:solidFill>
+              </a:rPr>
+              <a:t>•  5-tupla — IP origen, IP destino, puerto origen, puerto destino y protocolo</a:t>
+            </a:r>
+          </a:p>
+          <a:p>
+            <a:pPr>
+              <a:spcAft>
+                <a:spcPts val="600"/>
+              </a:spcAft>
+            </a:pPr>
+            <a:r>
+              <a:rPr sz="1500">
+                <a:solidFill>
+                  <a:srgbClr val="22282E"/>
+                </a:solidFill>
+              </a:rPr>
+              <a:t>•  Metadatos de tráfico — Quién, cuándo, cuánto y con qué ritmo; sin el contenido</a:t>
+            </a:r>
+          </a:p>
+          <a:p>
+            <a:pPr>
+              <a:spcAft>
+                <a:spcPts val="600"/>
+              </a:spcAft>
+            </a:pPr>
+            <a:r>
+              <a:rPr sz="1500">
+                <a:solidFill>
+                  <a:srgbClr val="22282E"/>
+                </a:solidFill>
+              </a:rPr>
+              <a:t>•  NetFlow v5 — Formato clásico de Cisco, de campos fijos</a:t>
+            </a:r>
+          </a:p>
+          <a:p>
+            <a:pPr>
+              <a:spcAft>
+                <a:spcPts val="600"/>
+              </a:spcAft>
+            </a:pPr>
+            <a:r>
+              <a:rPr sz="1500">
+                <a:solidFill>
+                  <a:srgbClr val="22282E"/>
+                </a:solidFill>
+              </a:rPr>
+              <a:t>•  NetFlow v9 — Formato extensible mediante plantillas</a:t>
+            </a:r>
+          </a:p>
+          <a:p>
+            <a:pPr>
+              <a:spcAft>
+                <a:spcPts val="600"/>
+              </a:spcAft>
+            </a:pPr>
+            <a:r>
+              <a:rPr sz="1500">
+                <a:solidFill>
+                  <a:srgbClr val="22282E"/>
+                </a:solidFill>
+              </a:rPr>
+              <a:t>•  IPFIX — Estándar abierto derivado de NetFlow v9</a:t>
             </a:r>
           </a:p>
         </p:txBody>
@@ -4569,7 +4960,7 @@
                   <a:srgbClr val="0B3D2E"/>
                 </a:solidFill>
               </a:rPr>
-              <a:t>✍️ Ejercicios</a:t>
+              <a:t>🧰 Herramientas y preparación</a:t>
             </a:r>
           </a:p>
         </p:txBody>
@@ -4607,82 +4998,52 @@
                   <a:srgbClr val="22282E"/>
                 </a:solidFill>
               </a:rPr>
-              <a:t>•  Identifica los cinco pares de hosts que más bytes intercambiaron en tu captura de flujos.</a:t>
-            </a:r>
-          </a:p>
-          <a:p>
-            <a:pPr>
-              <a:spcAft>
-                <a:spcPts val="600"/>
-              </a:spcAft>
-            </a:pPr>
-            <a:r>
-              <a:rPr sz="1500">
-                <a:solidFill>
-                  <a:srgbClr val="22282E"/>
-                </a:solidFill>
-              </a:rPr>
-              <a:t>•  Detecta un escaneo horizontal (una IP contra muchas) en los flujos y descríbelo.</a:t>
-            </a:r>
-          </a:p>
-          <a:p>
-            <a:pPr>
-              <a:spcAft>
-                <a:spcPts val="600"/>
-              </a:spcAft>
-            </a:pPr>
-            <a:r>
-              <a:rPr sz="1500">
-                <a:solidFill>
-                  <a:srgbClr val="22282E"/>
-                </a:solidFill>
-              </a:rPr>
-              <a:t>•  Explica cómo se vería un ataque DDoS volumétrico en los metadatos de flujo.</a:t>
-            </a:r>
-          </a:p>
-          <a:p>
-            <a:pPr>
-              <a:spcAft>
-                <a:spcPts val="600"/>
-              </a:spcAft>
-            </a:pPr>
-            <a:r>
-              <a:rPr sz="1500">
-                <a:solidFill>
-                  <a:srgbClr val="22282E"/>
-                </a:solidFill>
-              </a:rPr>
-              <a:t>•  Busca un patrón de beaconing y argumenta por qué la regularidad temporal es sospechosa.</a:t>
-            </a:r>
-          </a:p>
-          <a:p>
-            <a:pPr>
-              <a:spcAft>
-                <a:spcPts val="600"/>
-              </a:spcAft>
-            </a:pPr>
-            <a:r>
-              <a:rPr sz="1500">
-                <a:solidFill>
-                  <a:srgbClr val="22282E"/>
-                </a:solidFill>
-              </a:rPr>
-              <a:t>•  Compara el tamaño en disco de los flujos frente al pcap equivalente y comenta el ahorro.</a:t>
-            </a:r>
-          </a:p>
-          <a:p>
-            <a:pPr>
-              <a:spcAft>
-                <a:spcPts val="600"/>
-              </a:spcAft>
-            </a:pPr>
-            <a:r>
-              <a:rPr sz="1500">
-                <a:solidFill>
-                  <a:srgbClr val="22282E"/>
-                </a:solidFill>
-              </a:rPr>
-              <a:t>•  Diseña qué campos de flujo alimentarías a un SIEM para alertas de anomalía de red.</a:t>
+              <a:t>•  nfdump/nfcapd (colector y consulta de NetFlow): sudo apt install nfdump.</a:t>
+            </a:r>
+          </a:p>
+          <a:p>
+            <a:pPr>
+              <a:spcAft>
+                <a:spcPts val="600"/>
+              </a:spcAft>
+            </a:pPr>
+            <a:r>
+              <a:rPr sz="1500">
+                <a:solidFill>
+                  <a:srgbClr val="22282E"/>
+                </a:solidFill>
+              </a:rPr>
+              <a:t>•  SiLK (System for Internet-Level Knowledge) para análisis avanzado.</a:t>
+            </a:r>
+          </a:p>
+          <a:p>
+            <a:pPr>
+              <a:spcAft>
+                <a:spcPts val="600"/>
+              </a:spcAft>
+            </a:pPr>
+            <a:r>
+              <a:rPr sz="1500">
+                <a:solidFill>
+                  <a:srgbClr val="22282E"/>
+                </a:solidFill>
+              </a:rPr>
+              <a:t>•  softflowd o fprobe para generar NetFlow a partir de tráfico si no tienes un router que lo exporte.</a:t>
+            </a:r>
+          </a:p>
+          <a:p>
+            <a:pPr>
+              <a:spcAft>
+                <a:spcPts val="600"/>
+              </a:spcAft>
+            </a:pPr>
+            <a:r>
+              <a:rPr sz="1500">
+                <a:solidFill>
+                  <a:srgbClr val="22282E"/>
+                </a:solidFill>
+              </a:rPr>
+              <a:t>•  Un pcap o tráfico en vivo de laboratorio.</a:t>
             </a:r>
           </a:p>
         </p:txBody>
@@ -4733,7 +5094,7 @@
                   <a:srgbClr val="0B3D2E"/>
                 </a:solidFill>
               </a:rPr>
-              <a:t>📝 Reto verificable</a:t>
+              <a:t>🧪 Laboratorio guiado</a:t>
             </a:r>
           </a:p>
         </p:txBody>
@@ -4771,22 +5132,97 @@
                   <a:srgbClr val="22282E"/>
                 </a:solidFill>
               </a:rPr>
-              <a:t>•  Genera flujos NetFlow de tu laboratorio que incluyan tráfico normal más una actividad anómala que tú introduzcas (un escaneo con Nmap o una transferencia grande hacia un destino externo simulado). Usando solo los metadatos de flujo (sin abrir el pcap), detecta y caracteriza la anomalía: IP implicada, tipo de comportamiento y evidencia (consulta nfdump). Entrega los comandos y la conclusión.</a:t>
-            </a:r>
-          </a:p>
-          <a:p>
-            <a:pPr>
-              <a:spcAft>
-                <a:spcPts val="600"/>
-              </a:spcAft>
-            </a:pPr>
-            <a:r>
-              <a:rPr sz="1500">
-                <a:solidFill>
-                  <a:srgbClr val="22282E"/>
-                </a:solidFill>
-              </a:rPr>
-              <a:t>•  Criterio de aceptación: identificas correctamente la actividad anómala a partir de los flujos (no del contenido), la caracterizas (escaneo/exfiltración/beaconing) y aportas la consulta nfdump que la evidencia, coincidiendo con lo que tú introdujiste.</a:t>
+              <a:t>•  Genera NetFlow desde tráfico en vivo con softflowd apuntando a un colector local:</a:t>
+            </a:r>
+          </a:p>
+          <a:p>
+            <a:pPr>
+              <a:spcAft>
+                <a:spcPts val="600"/>
+              </a:spcAft>
+            </a:pPr>
+            <a:r>
+              <a:rPr sz="1500">
+                <a:solidFill>
+                  <a:srgbClr val="22282E"/>
+                </a:solidFill>
+              </a:rPr>
+              <a:t>•  Recolecta con nfcapd:</a:t>
+            </a:r>
+          </a:p>
+          <a:p>
+            <a:pPr>
+              <a:spcAft>
+                <a:spcPts val="600"/>
+              </a:spcAft>
+            </a:pPr>
+            <a:r>
+              <a:rPr sz="1500">
+                <a:solidFill>
+                  <a:srgbClr val="22282E"/>
+                </a:solidFill>
+              </a:rPr>
+              <a:t>•  Consulta los flujos con nfdump:</a:t>
+            </a:r>
+          </a:p>
+          <a:p>
+            <a:pPr>
+              <a:spcAft>
+                <a:spcPts val="600"/>
+              </a:spcAft>
+            </a:pPr>
+            <a:r>
+              <a:rPr sz="1500">
+                <a:solidFill>
+                  <a:srgbClr val="22282E"/>
+                </a:solidFill>
+              </a:rPr>
+              <a:t>•  Top talkers (quién genera más tráfico):</a:t>
+            </a:r>
+          </a:p>
+          <a:p>
+            <a:pPr>
+              <a:spcAft>
+                <a:spcPts val="600"/>
+              </a:spcAft>
+            </a:pPr>
+            <a:r>
+              <a:rPr sz="1500">
+                <a:solidFill>
+                  <a:srgbClr val="22282E"/>
+                </a:solidFill>
+              </a:rPr>
+              <a:t>•  Detecta un escaneo (una IP tocando muchos puertos/destinos con pocos bytes):</a:t>
+            </a:r>
+          </a:p>
+          <a:p>
+            <a:pPr>
+              <a:spcAft>
+                <a:spcPts val="600"/>
+              </a:spcAft>
+            </a:pPr>
+            <a:r>
+              <a:rPr sz="1500">
+                <a:solidFill>
+                  <a:srgbClr val="22282E"/>
+                </a:solidFill>
+              </a:rPr>
+              <a:t>•  Busca beaconing: agrupa por par origen-destino y observa la regularidad temporal de los flujos hacia un mismo destino.</a:t>
+            </a:r>
+          </a:p>
+          <a:p>
+            <a:pPr>
+              <a:spcAft>
+                <a:spcPts val="600"/>
+              </a:spcAft>
+            </a:pPr>
+            <a:r>
+              <a:rPr sz="1500">
+                <a:solidFill>
+                  <a:srgbClr val="22282E"/>
+                </a:solidFill>
+              </a:rPr>
+              <a:t>•  Detecta posible exfiltración: flujos salientes con origbytes muy superiores a lo habitual hacia destinos externos:</a:t>
             </a:r>
           </a:p>
         </p:txBody>
